--- a/slides/Malaria_Phase2_Baseline_Hypothesis_filled.pptx
+++ b/slides/Malaria_Phase2_Baseline_Hypothesis_filled.pptx
@@ -14728,7 +14728,7 @@
                 </a:solidFill>
                 <a:latin typeface="Calibri"/>
               </a:rPr>
-              <a:t>Multimedia Tools and Applications 81 (2022). We need a published, reproducible model to compare our changes against.</a:t>
+              <a:t>Multimedia Tools and Applications 81 (2022). Chosen from the 11 papers in our Phase 1 survey: the strongest-documented, reproducible model to compare our changes against.</a:t>
             </a:r>
           </a:p>
         </p:txBody>
